--- a/assets/pptx/catalog-502.pptx
+++ b/assets/pptx/catalog-502.pptx
@@ -3259,7 +3259,7 @@
                 <a:ea typeface="Ebrima"/>
                 <a:cs typeface="Ebrima"/>
               </a:rPr>
-              <a:t>ምድሩ የአንተ ነው የአንተ ነው (2x)</a:t>
+              <a:t>ምድሩ የአንተ ነው የአንተ ነው 2x</a:t>
             </a:r>
           </a:p>
           <a:p>
@@ -3277,7 +3277,7 @@
                 <a:ea typeface="Ebrima"/>
                 <a:cs typeface="Ebrima"/>
               </a:rPr>
-              <a:t>ባለጠግነትህ ዓለምን ሸፈነው (4x)</a:t>
+              <a:t>ባለጠግነትህ ዓለምን ሸፈነው 4x</a:t>
             </a:r>
           </a:p>
           <a:p>
@@ -3349,7 +3349,7 @@
                 <a:ea typeface="Ebrima"/>
                 <a:cs typeface="Ebrima"/>
               </a:rPr>
-              <a:t>ባለጠጋ መሆንክህን እኔ እናገራለሁ (2x)</a:t>
+              <a:t>ባለጠጋ መሆንክህን እኔ እናገራለሁ 2x</a:t>
             </a:r>
           </a:p>
           <a:p>
@@ -3367,7 +3367,7 @@
                 <a:ea typeface="Ebrima"/>
                 <a:cs typeface="Ebrima"/>
               </a:rPr>
-              <a:t>ባለጠግነትህ ዓለምን ሸፈነው (4x)</a:t>
+              <a:t>ባለጠግነትህ ዓለምን ሸፈነው 4x</a:t>
             </a:r>
           </a:p>
           <a:p>
@@ -3403,7 +3403,7 @@
                 <a:ea typeface="Ebrima"/>
                 <a:cs typeface="Ebrima"/>
               </a:rPr>
-              <a:t>አምላኬ ሞገስ ያለው ሞገስ ያለዉ (2x)</a:t>
+              <a:t>አምላኬ ሞገስ ያለው ሞገስ ያለዉ 2x</a:t>
             </a:r>
           </a:p>
           <a:p>
@@ -3457,7 +3457,7 @@
                 <a:ea typeface="Ebrima"/>
                 <a:cs typeface="Ebrima"/>
               </a:rPr>
-              <a:t>(4x)</a:t>
+              <a:t>4x</a:t>
             </a:r>
           </a:p>
           <a:p>
@@ -3475,7 +3475,7 @@
                 <a:ea typeface="Ebrima"/>
                 <a:cs typeface="Ebrima"/>
               </a:rPr>
-              <a:t>ባለጠግነትህ ዓለምን ሸፈነው (4x)</a:t>
+              <a:t>ባለጠግነትህ ዓለምን ሸፈነው 4x</a:t>
             </a:r>
           </a:p>
           <a:p>
@@ -3547,7 +3547,7 @@
                 <a:ea typeface="Ebrima"/>
                 <a:cs typeface="Ebrima"/>
               </a:rPr>
-              <a:t>አቤት የእኔ ጌታ አቤት የእኔ ጌታ (4x)</a:t>
+              <a:t>አቤት የእኔ ጌታ አቤት የእኔ ጌታ 4x</a:t>
             </a:r>
           </a:p>
         </p:txBody>
